--- a/docs/manual/つなぐ依頼ページ_運用マニュアル.pptx
+++ b/docs/manual/つなぐ依頼ページ_運用マニュアル.pptx
@@ -6268,11 +6268,11 @@
         <p:spPr>
           <a:xfrm>
             <a:off x="6583680" y="2395728"/>
-            <a:ext cx="4956048" cy="1481328"/>
+            <a:ext cx="4956048" cy="1078992"/>
           </a:xfrm>
           <a:prstGeom prst="roundRect">
             <a:avLst>
-              <a:gd name="adj" fmla="val 3704"/>
+              <a:gd name="adj" fmla="val 5085"/>
             </a:avLst>
           </a:prstGeom>
           <a:solidFill>
@@ -6294,8 +6294,8 @@
         </p:nvSpPr>
         <p:spPr>
           <a:xfrm>
-            <a:off x="6803136" y="2560320"/>
-            <a:ext cx="4572000" cy="1188720"/>
+            <a:off x="6803136" y="2505456"/>
+            <a:ext cx="4572000" cy="859536"/>
           </a:xfrm>
           <a:prstGeom prst="rect">
             <a:avLst/>
@@ -6309,7 +6309,7 @@
           <a:p>
             <a:pPr indent="0" marL="0">
               <a:lnSpc>
-                <a:spcPct val="140000"/>
+                <a:spcPct val="132000"/>
               </a:lnSpc>
               <a:buNone/>
             </a:pPr>
@@ -6329,7 +6329,7 @@
           <a:p>
             <a:pPr indent="0" marL="0">
               <a:lnSpc>
-                <a:spcPct val="140000"/>
+                <a:spcPct val="132000"/>
               </a:lnSpc>
               <a:buNone/>
             </a:pPr>
@@ -6349,7 +6349,7 @@
           <a:p>
             <a:pPr indent="0" marL="0">
               <a:lnSpc>
-                <a:spcPct val="140000"/>
+                <a:spcPct val="132000"/>
               </a:lnSpc>
               <a:buNone/>
             </a:pPr>
@@ -6376,7 +6376,7 @@
         </p:nvSpPr>
         <p:spPr>
           <a:xfrm>
-            <a:off x="6583680" y="3931920"/>
+            <a:off x="6583680" y="3547872"/>
             <a:ext cx="4956048" cy="274320"/>
           </a:xfrm>
           <a:prstGeom prst="rect">
@@ -8680,7 +8680,7 @@
         <p:spPr>
           <a:xfrm>
             <a:off x="731520" y="4343400"/>
-            <a:ext cx="10625328" cy="1508760"/>
+            <a:ext cx="10716768" cy="1508760"/>
           </a:xfrm>
           <a:prstGeom prst="roundRect">
             <a:avLst>
@@ -8706,7 +8706,7 @@
         </p:nvSpPr>
         <p:spPr>
           <a:xfrm>
-            <a:off x="5660136" y="4622292"/>
+            <a:off x="5705856" y="4622292"/>
             <a:ext cx="768096" cy="566928"/>
           </a:xfrm>
           <a:prstGeom prst="roundRect">
@@ -8733,7 +8733,7 @@
         </p:nvSpPr>
         <p:spPr>
           <a:xfrm>
-            <a:off x="5806440" y="4722876"/>
+            <a:off x="5852160" y="4722876"/>
             <a:ext cx="146304" cy="146304"/>
           </a:xfrm>
           <a:prstGeom prst="ellipse">
@@ -8753,7 +8753,7 @@
         </p:nvSpPr>
         <p:spPr>
           <a:xfrm>
-            <a:off x="5934456" y="4823460"/>
+            <a:off x="5980176" y="4823460"/>
             <a:ext cx="420624" cy="274320"/>
           </a:xfrm>
           <a:prstGeom prst="triangle">
@@ -8774,7 +8774,7 @@
         <p:spPr>
           <a:xfrm>
             <a:off x="731520" y="5244084"/>
-            <a:ext cx="10625328" cy="237744"/>
+            <a:ext cx="10716768" cy="237744"/>
           </a:xfrm>
           <a:prstGeom prst="rect">
             <a:avLst/>
@@ -8813,7 +8813,7 @@
         <p:spPr>
           <a:xfrm>
             <a:off x="914400" y="5500116"/>
-            <a:ext cx="10259568" cy="457200"/>
+            <a:ext cx="10351008" cy="457200"/>
           </a:xfrm>
           <a:prstGeom prst="rect">
             <a:avLst/>
@@ -11420,7 +11420,7 @@
         <p:spPr>
           <a:xfrm>
             <a:off x="1627632" y="2057400"/>
-            <a:ext cx="9601200" cy="292608"/>
+            <a:ext cx="5852160" cy="292608"/>
           </a:xfrm>
           <a:prstGeom prst="rect">
             <a:avLst/>
@@ -11453,6 +11453,72 @@
       <p:sp>
         <p:nvSpPr>
           <p:cNvPr id="9" name="Shape 7"/>
+          <p:cNvSpPr/>
+          <p:nvPr/>
+        </p:nvSpPr>
+        <p:spPr>
+          <a:xfrm>
+            <a:off x="7699248" y="1837944"/>
+            <a:ext cx="3611880" cy="402336"/>
+          </a:xfrm>
+          <a:prstGeom prst="roundRect">
+            <a:avLst>
+              <a:gd name="adj" fmla="val 50000"/>
+            </a:avLst>
+          </a:prstGeom>
+          <a:solidFill>
+            <a:srgbClr val="FFFFFF"/>
+          </a:solidFill>
+          <a:ln w="12700">
+            <a:solidFill>
+              <a:srgbClr val="E4EAF2"/>
+            </a:solidFill>
+            <a:prstDash val="solid"/>
+          </a:ln>
+        </p:spPr>
+      </p:sp>
+      <p:sp>
+        <p:nvSpPr>
+          <p:cNvPr id="10" name="Text 8"/>
+          <p:cNvSpPr/>
+          <p:nvPr/>
+        </p:nvSpPr>
+        <p:spPr>
+          <a:xfrm>
+            <a:off x="7699248" y="1837944"/>
+            <a:ext cx="3611880" cy="402336"/>
+          </a:xfrm>
+          <a:prstGeom prst="rect">
+            <a:avLst/>
+          </a:prstGeom>
+          <a:noFill/>
+          <a:ln/>
+        </p:spPr>
+        <p:txBody>
+          <a:bodyPr wrap="square" lIns="0" tIns="0" rIns="0" bIns="0" rtlCol="0" anchor="ctr"/>
+          <a:lstStyle/>
+          <a:p>
+            <a:pPr algn="ctr" indent="0" marL="0">
+              <a:buNone/>
+            </a:pPr>
+            <a:r>
+              <a:rPr lang="en-US" sz="1100" b="1" dirty="0">
+                <a:solidFill>
+                  <a:srgbClr val="0D3FA6"/>
+                </a:solidFill>
+                <a:latin typeface="Meiryo" pitchFamily="34" charset="0"/>
+                <a:ea typeface="Meiryo" pitchFamily="34" charset="-122"/>
+                <a:cs typeface="Meiryo" pitchFamily="34" charset="-120"/>
+              </a:rPr>
+              <a:t>ログイン手順 ／ 管理画面の見方</a:t>
+            </a:r>
+            <a:endParaRPr lang="en-US" sz="1100" dirty="0"/>
+          </a:p>
+        </p:txBody>
+      </p:sp>
+      <p:sp>
+        <p:nvSpPr>
+          <p:cNvPr id="11" name="Shape 9"/>
           <p:cNvSpPr/>
           <p:nvPr/>
         </p:nvSpPr>
@@ -11479,7 +11545,7 @@
       </p:sp>
       <p:sp>
         <p:nvSpPr>
-          <p:cNvPr id="10" name="Shape 8"/>
+          <p:cNvPr id="12" name="Shape 10"/>
           <p:cNvSpPr/>
           <p:nvPr/>
         </p:nvSpPr>
@@ -11499,7 +11565,7 @@
       </p:sp>
       <p:sp>
         <p:nvSpPr>
-          <p:cNvPr id="11" name="Text 9"/>
+          <p:cNvPr id="13" name="Text 11"/>
           <p:cNvSpPr/>
           <p:nvPr/>
         </p:nvSpPr>
@@ -11538,7 +11604,7 @@
       </p:sp>
       <p:sp>
         <p:nvSpPr>
-          <p:cNvPr id="12" name="Text 10"/>
+          <p:cNvPr id="14" name="Text 12"/>
           <p:cNvSpPr/>
           <p:nvPr/>
         </p:nvSpPr>
@@ -11577,14 +11643,14 @@
       </p:sp>
       <p:sp>
         <p:nvSpPr>
-          <p:cNvPr id="13" name="Text 11"/>
+          <p:cNvPr id="15" name="Text 13"/>
           <p:cNvSpPr/>
           <p:nvPr/>
         </p:nvSpPr>
         <p:spPr>
           <a:xfrm>
             <a:off x="1627632" y="3172968"/>
-            <a:ext cx="9601200" cy="292608"/>
+            <a:ext cx="5852160" cy="292608"/>
           </a:xfrm>
           <a:prstGeom prst="rect">
             <a:avLst/>
@@ -11616,7 +11682,73 @@
       </p:sp>
       <p:sp>
         <p:nvSpPr>
-          <p:cNvPr id="14" name="Shape 12"/>
+          <p:cNvPr id="16" name="Shape 14"/>
+          <p:cNvSpPr/>
+          <p:nvPr/>
+        </p:nvSpPr>
+        <p:spPr>
+          <a:xfrm>
+            <a:off x="7699248" y="2953512"/>
+            <a:ext cx="3611880" cy="402336"/>
+          </a:xfrm>
+          <a:prstGeom prst="roundRect">
+            <a:avLst>
+              <a:gd name="adj" fmla="val 50000"/>
+            </a:avLst>
+          </a:prstGeom>
+          <a:solidFill>
+            <a:srgbClr val="FFFFFF"/>
+          </a:solidFill>
+          <a:ln w="12700">
+            <a:solidFill>
+              <a:srgbClr val="E4EAF2"/>
+            </a:solidFill>
+            <a:prstDash val="solid"/>
+          </a:ln>
+        </p:spPr>
+      </p:sp>
+      <p:sp>
+        <p:nvSpPr>
+          <p:cNvPr id="17" name="Text 15"/>
+          <p:cNvSpPr/>
+          <p:nvPr/>
+        </p:nvSpPr>
+        <p:spPr>
+          <a:xfrm>
+            <a:off x="7699248" y="2953512"/>
+            <a:ext cx="3611880" cy="402336"/>
+          </a:xfrm>
+          <a:prstGeom prst="rect">
+            <a:avLst/>
+          </a:prstGeom>
+          <a:noFill/>
+          <a:ln/>
+        </p:spPr>
+        <p:txBody>
+          <a:bodyPr wrap="square" lIns="0" tIns="0" rIns="0" bIns="0" rtlCol="0" anchor="ctr"/>
+          <a:lstStyle/>
+          <a:p>
+            <a:pPr algn="ctr" indent="0" marL="0">
+              <a:buNone/>
+            </a:pPr>
+            <a:r>
+              <a:rPr lang="en-US" sz="1100" b="1" dirty="0">
+                <a:solidFill>
+                  <a:srgbClr val="0D3FA6"/>
+                </a:solidFill>
+                <a:latin typeface="Meiryo" pitchFamily="34" charset="0"/>
+                <a:ea typeface="Meiryo" pitchFamily="34" charset="-122"/>
+                <a:cs typeface="Meiryo" pitchFamily="34" charset="-120"/>
+              </a:rPr>
+              <a:t>基本の流れ ／ 修正例3種</a:t>
+            </a:r>
+            <a:endParaRPr lang="en-US" sz="1100" dirty="0"/>
+          </a:p>
+        </p:txBody>
+      </p:sp>
+      <p:sp>
+        <p:nvSpPr>
+          <p:cNvPr id="18" name="Shape 16"/>
           <p:cNvSpPr/>
           <p:nvPr/>
         </p:nvSpPr>
@@ -11643,7 +11775,7 @@
       </p:sp>
       <p:sp>
         <p:nvSpPr>
-          <p:cNvPr id="15" name="Shape 13"/>
+          <p:cNvPr id="19" name="Shape 17"/>
           <p:cNvSpPr/>
           <p:nvPr/>
         </p:nvSpPr>
@@ -11663,7 +11795,7 @@
       </p:sp>
       <p:sp>
         <p:nvSpPr>
-          <p:cNvPr id="16" name="Text 14"/>
+          <p:cNvPr id="20" name="Text 18"/>
           <p:cNvSpPr/>
           <p:nvPr/>
         </p:nvSpPr>
@@ -11702,7 +11834,7 @@
       </p:sp>
       <p:sp>
         <p:nvSpPr>
-          <p:cNvPr id="17" name="Text 15"/>
+          <p:cNvPr id="21" name="Text 19"/>
           <p:cNvSpPr/>
           <p:nvPr/>
         </p:nvSpPr>
@@ -11741,14 +11873,14 @@
       </p:sp>
       <p:sp>
         <p:nvSpPr>
-          <p:cNvPr id="18" name="Text 16"/>
+          <p:cNvPr id="22" name="Text 20"/>
           <p:cNvSpPr/>
           <p:nvPr/>
         </p:nvSpPr>
         <p:spPr>
           <a:xfrm>
             <a:off x="1627632" y="4288536"/>
-            <a:ext cx="9601200" cy="292608"/>
+            <a:ext cx="5852160" cy="292608"/>
           </a:xfrm>
           <a:prstGeom prst="rect">
             <a:avLst/>
@@ -11780,7 +11912,73 @@
       </p:sp>
       <p:sp>
         <p:nvSpPr>
-          <p:cNvPr id="19" name="Shape 17"/>
+          <p:cNvPr id="23" name="Shape 21"/>
+          <p:cNvSpPr/>
+          <p:nvPr/>
+        </p:nvSpPr>
+        <p:spPr>
+          <a:xfrm>
+            <a:off x="7699248" y="4069080"/>
+            <a:ext cx="3611880" cy="402336"/>
+          </a:xfrm>
+          <a:prstGeom prst="roundRect">
+            <a:avLst>
+              <a:gd name="adj" fmla="val 50000"/>
+            </a:avLst>
+          </a:prstGeom>
+          <a:solidFill>
+            <a:srgbClr val="FFFFFF"/>
+          </a:solidFill>
+          <a:ln w="12700">
+            <a:solidFill>
+              <a:srgbClr val="E4EAF2"/>
+            </a:solidFill>
+            <a:prstDash val="solid"/>
+          </a:ln>
+        </p:spPr>
+      </p:sp>
+      <p:sp>
+        <p:nvSpPr>
+          <p:cNvPr id="24" name="Text 22"/>
+          <p:cNvSpPr/>
+          <p:nvPr/>
+        </p:nvSpPr>
+        <p:spPr>
+          <a:xfrm>
+            <a:off x="7699248" y="4069080"/>
+            <a:ext cx="3611880" cy="402336"/>
+          </a:xfrm>
+          <a:prstGeom prst="rect">
+            <a:avLst/>
+          </a:prstGeom>
+          <a:noFill/>
+          <a:ln/>
+        </p:spPr>
+        <p:txBody>
+          <a:bodyPr wrap="square" lIns="0" tIns="0" rIns="0" bIns="0" rtlCol="0" anchor="ctr"/>
+          <a:lstStyle/>
+          <a:p>
+            <a:pPr algn="ctr" indent="0" marL="0">
+              <a:buNone/>
+            </a:pPr>
+            <a:r>
+              <a:rPr lang="en-US" sz="1100" b="1" dirty="0">
+                <a:solidFill>
+                  <a:srgbClr val="0D3FA6"/>
+                </a:solidFill>
+                <a:latin typeface="Meiryo" pitchFamily="34" charset="0"/>
+                <a:ea typeface="Meiryo" pitchFamily="34" charset="-122"/>
+                <a:cs typeface="Meiryo" pitchFamily="34" charset="-120"/>
+              </a:rPr>
+              <a:t>文言・宛先の変更 ／ 紐付け</a:t>
+            </a:r>
+            <a:endParaRPr lang="en-US" sz="1100" dirty="0"/>
+          </a:p>
+        </p:txBody>
+      </p:sp>
+      <p:sp>
+        <p:nvSpPr>
+          <p:cNvPr id="25" name="Shape 23"/>
           <p:cNvSpPr/>
           <p:nvPr/>
         </p:nvSpPr>
@@ -11807,7 +12005,7 @@
       </p:sp>
       <p:sp>
         <p:nvSpPr>
-          <p:cNvPr id="20" name="Shape 18"/>
+          <p:cNvPr id="26" name="Shape 24"/>
           <p:cNvSpPr/>
           <p:nvPr/>
         </p:nvSpPr>
@@ -11827,7 +12025,7 @@
       </p:sp>
       <p:sp>
         <p:nvSpPr>
-          <p:cNvPr id="21" name="Text 19"/>
+          <p:cNvPr id="27" name="Text 25"/>
           <p:cNvSpPr/>
           <p:nvPr/>
         </p:nvSpPr>
@@ -11866,7 +12064,7 @@
       </p:sp>
       <p:sp>
         <p:nvSpPr>
-          <p:cNvPr id="22" name="Text 20"/>
+          <p:cNvPr id="28" name="Text 26"/>
           <p:cNvSpPr/>
           <p:nvPr/>
         </p:nvSpPr>
@@ -11905,14 +12103,14 @@
       </p:sp>
       <p:sp>
         <p:nvSpPr>
-          <p:cNvPr id="23" name="Text 21"/>
+          <p:cNvPr id="29" name="Text 27"/>
           <p:cNvSpPr/>
           <p:nvPr/>
         </p:nvSpPr>
         <p:spPr>
           <a:xfrm>
             <a:off x="1627632" y="5404104"/>
-            <a:ext cx="9601200" cy="292608"/>
+            <a:ext cx="5852160" cy="292608"/>
           </a:xfrm>
           <a:prstGeom prst="rect">
             <a:avLst/>
@@ -11939,6 +12137,72 @@
               <a:t>会員アカウントの作り方（会社名の入力は必須）</a:t>
             </a:r>
             <a:endParaRPr lang="en-US" sz="1200" dirty="0"/>
+          </a:p>
+        </p:txBody>
+      </p:sp>
+      <p:sp>
+        <p:nvSpPr>
+          <p:cNvPr id="30" name="Shape 28"/>
+          <p:cNvSpPr/>
+          <p:nvPr/>
+        </p:nvSpPr>
+        <p:spPr>
+          <a:xfrm>
+            <a:off x="7699248" y="5184648"/>
+            <a:ext cx="3611880" cy="402336"/>
+          </a:xfrm>
+          <a:prstGeom prst="roundRect">
+            <a:avLst>
+              <a:gd name="adj" fmla="val 50000"/>
+            </a:avLst>
+          </a:prstGeom>
+          <a:solidFill>
+            <a:srgbClr val="FFFFFF"/>
+          </a:solidFill>
+          <a:ln w="12700">
+            <a:solidFill>
+              <a:srgbClr val="E4EAF2"/>
+            </a:solidFill>
+            <a:prstDash val="solid"/>
+          </a:ln>
+        </p:spPr>
+      </p:sp>
+      <p:sp>
+        <p:nvSpPr>
+          <p:cNvPr id="31" name="Text 29"/>
+          <p:cNvSpPr/>
+          <p:nvPr/>
+        </p:nvSpPr>
+        <p:spPr>
+          <a:xfrm>
+            <a:off x="7699248" y="5184648"/>
+            <a:ext cx="3611880" cy="402336"/>
+          </a:xfrm>
+          <a:prstGeom prst="rect">
+            <a:avLst/>
+          </a:prstGeom>
+          <a:noFill/>
+          <a:ln/>
+        </p:spPr>
+        <p:txBody>
+          <a:bodyPr wrap="square" lIns="0" tIns="0" rIns="0" bIns="0" rtlCol="0" anchor="ctr"/>
+          <a:lstStyle/>
+          <a:p>
+            <a:pPr algn="ctr" indent="0" marL="0">
+              <a:buNone/>
+            </a:pPr>
+            <a:r>
+              <a:rPr lang="en-US" sz="1100" b="1" dirty="0">
+                <a:solidFill>
+                  <a:srgbClr val="0D3FA6"/>
+                </a:solidFill>
+                <a:latin typeface="Meiryo" pitchFamily="34" charset="0"/>
+                <a:ea typeface="Meiryo" pitchFamily="34" charset="-122"/>
+                <a:cs typeface="Meiryo" pitchFamily="34" charset="-120"/>
+              </a:rPr>
+              <a:t>登録手順 ／ 運用の注意点</a:t>
+            </a:r>
+            <a:endParaRPr lang="en-US" sz="1100" dirty="0"/>
           </a:p>
         </p:txBody>
       </p:sp>
@@ -13701,8 +13965,8 @@
         </p:nvSpPr>
         <p:spPr>
           <a:xfrm>
-            <a:off x="-1097280" y="3840480"/>
-            <a:ext cx="4206240" cy="4206240"/>
+            <a:off x="-1828800" y="-1188720"/>
+            <a:ext cx="3840480" cy="3840480"/>
           </a:xfrm>
           <a:prstGeom prst="ellipse">
             <a:avLst/>
@@ -14248,9 +14512,9 @@
               <a:buNone/>
             </a:pPr>
             <a:r>
-              <a:rPr lang="en-US" sz="1050" dirty="0">
-                <a:solidFill>
-                  <a:srgbClr val="6D8CBF"/>
+              <a:rPr lang="en-US" sz="1100" dirty="0">
+                <a:solidFill>
+                  <a:srgbClr val="9FC0F0"/>
                 </a:solidFill>
                 <a:latin typeface="Meiryo" pitchFamily="34" charset="0"/>
                 <a:ea typeface="Meiryo" pitchFamily="34" charset="-122"/>
@@ -14258,7 +14522,7 @@
               </a:rPr>
               <a:t>つなぐ依頼ページ 運用マニュアル ／ 版数 1.0</a:t>
             </a:r>
-            <a:endParaRPr lang="en-US" sz="1050" dirty="0"/>
+            <a:endParaRPr lang="en-US" sz="1100" dirty="0"/>
           </a:p>
         </p:txBody>
       </p:sp>
@@ -14501,8 +14765,8 @@
         </p:nvSpPr>
         <p:spPr>
           <a:xfrm>
-            <a:off x="4023360" y="2395728"/>
-            <a:ext cx="640080" cy="457200"/>
+            <a:off x="3977640" y="2395728"/>
+            <a:ext cx="516636" cy="457200"/>
           </a:xfrm>
           <a:prstGeom prst="rect">
             <a:avLst/>
@@ -14540,7 +14804,7 @@
         </p:nvSpPr>
         <p:spPr>
           <a:xfrm>
-            <a:off x="4709160" y="1783080"/>
+            <a:off x="4494276" y="1783080"/>
             <a:ext cx="3200400" cy="1691640"/>
           </a:xfrm>
           <a:prstGeom prst="roundRect">
@@ -14567,7 +14831,7 @@
         </p:nvSpPr>
         <p:spPr>
           <a:xfrm>
-            <a:off x="4709160" y="2011680"/>
+            <a:off x="4494276" y="2011680"/>
             <a:ext cx="3200400" cy="384048"/>
           </a:xfrm>
           <a:prstGeom prst="rect">
@@ -14606,7 +14870,7 @@
         </p:nvSpPr>
         <p:spPr>
           <a:xfrm>
-            <a:off x="4892040" y="2468880"/>
+            <a:off x="4677156" y="2468880"/>
             <a:ext cx="2834640" cy="777240"/>
           </a:xfrm>
           <a:prstGeom prst="rect">
@@ -14668,8 +14932,8 @@
         </p:nvSpPr>
         <p:spPr>
           <a:xfrm>
-            <a:off x="7955280" y="2395728"/>
-            <a:ext cx="640080" cy="457200"/>
+            <a:off x="7694676" y="2395728"/>
+            <a:ext cx="516636" cy="457200"/>
           </a:xfrm>
           <a:prstGeom prst="rect">
             <a:avLst/>
@@ -14707,7 +14971,7 @@
         </p:nvSpPr>
         <p:spPr>
           <a:xfrm>
-            <a:off x="8641080" y="1783080"/>
+            <a:off x="8211312" y="1783080"/>
             <a:ext cx="3200400" cy="1691640"/>
           </a:xfrm>
           <a:prstGeom prst="roundRect">
@@ -14734,7 +14998,7 @@
         </p:nvSpPr>
         <p:spPr>
           <a:xfrm>
-            <a:off x="8641080" y="2011680"/>
+            <a:off x="8211312" y="2011680"/>
             <a:ext cx="3200400" cy="384048"/>
           </a:xfrm>
           <a:prstGeom prst="rect">
@@ -14773,7 +15037,7 @@
         </p:nvSpPr>
         <p:spPr>
           <a:xfrm>
-            <a:off x="8823960" y="2468880"/>
+            <a:off x="8394192" y="2468880"/>
             <a:ext cx="2834640" cy="777240"/>
           </a:xfrm>
           <a:prstGeom prst="rect">
@@ -17541,6 +17805,289 @@
             </a:avLst>
           </a:prstGeom>
           <a:solidFill>
+            <a:srgbClr val="F3F7FC"/>
+          </a:solidFill>
+          <a:ln w="19050">
+            <a:solidFill>
+              <a:srgbClr val="E4EAF2"/>
+            </a:solidFill>
+            <a:prstDash val="solid"/>
+          </a:ln>
+        </p:spPr>
+      </p:sp>
+      <p:sp>
+        <p:nvSpPr>
+          <p:cNvPr id="7" name="Shape 5"/>
+          <p:cNvSpPr/>
+          <p:nvPr/>
+        </p:nvSpPr>
+        <p:spPr>
+          <a:xfrm>
+            <a:off x="978408" y="1901952"/>
+            <a:ext cx="2148840" cy="329184"/>
+          </a:xfrm>
+          <a:prstGeom prst="roundRect">
+            <a:avLst>
+              <a:gd name="adj" fmla="val 50000"/>
+            </a:avLst>
+          </a:prstGeom>
+          <a:solidFill>
+            <a:srgbClr val="5D6B7E"/>
+          </a:solidFill>
+          <a:ln/>
+        </p:spPr>
+      </p:sp>
+      <p:sp>
+        <p:nvSpPr>
+          <p:cNvPr id="8" name="Text 6"/>
+          <p:cNvSpPr/>
+          <p:nvPr/>
+        </p:nvSpPr>
+        <p:spPr>
+          <a:xfrm>
+            <a:off x="978408" y="1901952"/>
+            <a:ext cx="2148840" cy="329184"/>
+          </a:xfrm>
+          <a:prstGeom prst="rect">
+            <a:avLst/>
+          </a:prstGeom>
+          <a:noFill/>
+          <a:ln/>
+        </p:spPr>
+        <p:txBody>
+          <a:bodyPr wrap="square" lIns="0" tIns="0" rIns="0" bIns="0" rtlCol="0" anchor="ctr"/>
+          <a:lstStyle/>
+          <a:p>
+            <a:pPr algn="ctr" indent="0" marL="0">
+              <a:buNone/>
+            </a:pPr>
+            <a:r>
+              <a:rPr lang="en-US" sz="1000" b="1" dirty="0">
+                <a:solidFill>
+                  <a:srgbClr val="FFFFFF"/>
+                </a:solidFill>
+                <a:latin typeface="Meiryo" pitchFamily="34" charset="0"/>
+                <a:ea typeface="Meiryo" pitchFamily="34" charset="-122"/>
+                <a:cs typeface="Meiryo" pitchFamily="34" charset="-120"/>
+              </a:rPr>
+              <a:t>会員の方</a:t>
+            </a:r>
+            <a:endParaRPr lang="en-US" sz="1000" dirty="0"/>
+          </a:p>
+        </p:txBody>
+      </p:sp>
+      <p:sp>
+        <p:nvSpPr>
+          <p:cNvPr id="9" name="Text 7"/>
+          <p:cNvSpPr/>
+          <p:nvPr/>
+        </p:nvSpPr>
+        <p:spPr>
+          <a:xfrm>
+            <a:off x="978408" y="2340864"/>
+            <a:ext cx="4626864" cy="402336"/>
+          </a:xfrm>
+          <a:prstGeom prst="rect">
+            <a:avLst/>
+          </a:prstGeom>
+          <a:noFill/>
+          <a:ln/>
+        </p:spPr>
+        <p:txBody>
+          <a:bodyPr wrap="square" lIns="0" tIns="0" rIns="0" bIns="0" rtlCol="0" anchor="ctr"/>
+          <a:lstStyle/>
+          <a:p>
+            <a:pPr indent="0" marL="0">
+              <a:buNone/>
+            </a:pPr>
+            <a:r>
+              <a:rPr lang="en-US" sz="2000" b="1" dirty="0">
+                <a:solidFill>
+                  <a:srgbClr val="11295A"/>
+                </a:solidFill>
+                <a:latin typeface="Meiryo" pitchFamily="34" charset="0"/>
+                <a:ea typeface="Meiryo" pitchFamily="34" charset="-122"/>
+                <a:cs typeface="Meiryo" pitchFamily="34" charset="-120"/>
+              </a:rPr>
+              <a:t>会員用ログイン</a:t>
+            </a:r>
+            <a:endParaRPr lang="en-US" sz="2000" dirty="0"/>
+          </a:p>
+        </p:txBody>
+      </p:sp>
+      <p:sp>
+        <p:nvSpPr>
+          <p:cNvPr id="10" name="Text 8"/>
+          <p:cNvSpPr/>
+          <p:nvPr/>
+        </p:nvSpPr>
+        <p:spPr>
+          <a:xfrm>
+            <a:off x="978408" y="2743200"/>
+            <a:ext cx="4626864" cy="292608"/>
+          </a:xfrm>
+          <a:prstGeom prst="rect">
+            <a:avLst/>
+          </a:prstGeom>
+          <a:noFill/>
+          <a:ln/>
+        </p:spPr>
+        <p:txBody>
+          <a:bodyPr wrap="square" lIns="0" tIns="0" rIns="0" bIns="0" rtlCol="0" anchor="ctr"/>
+          <a:lstStyle/>
+          <a:p>
+            <a:pPr indent="0" marL="0">
+              <a:buNone/>
+            </a:pPr>
+            <a:r>
+              <a:rPr lang="en-US" sz="1200" dirty="0">
+                <a:solidFill>
+                  <a:srgbClr val="5D6B7E"/>
+                </a:solidFill>
+                <a:latin typeface="Meiryo" pitchFamily="34" charset="0"/>
+                <a:ea typeface="Meiryo" pitchFamily="34" charset="-122"/>
+                <a:cs typeface="Meiryo" pitchFamily="34" charset="-120"/>
+              </a:rPr>
+              <a:t>サイトを閲覧するための入口</a:t>
+            </a:r>
+            <a:endParaRPr lang="en-US" sz="1200" dirty="0"/>
+          </a:p>
+        </p:txBody>
+      </p:sp>
+      <p:sp>
+        <p:nvSpPr>
+          <p:cNvPr id="11" name="Text 9"/>
+          <p:cNvSpPr/>
+          <p:nvPr/>
+        </p:nvSpPr>
+        <p:spPr>
+          <a:xfrm>
+            <a:off x="978408" y="3154680"/>
+            <a:ext cx="4626864" cy="365760"/>
+          </a:xfrm>
+          <a:prstGeom prst="rect">
+            <a:avLst/>
+          </a:prstGeom>
+          <a:noFill/>
+          <a:ln/>
+        </p:spPr>
+        <p:txBody>
+          <a:bodyPr wrap="square" lIns="0" tIns="0" rIns="0" bIns="0" rtlCol="0" anchor="ctr"/>
+          <a:lstStyle/>
+          <a:p>
+            <a:pPr indent="0" marL="0">
+              <a:buNone/>
+            </a:pPr>
+            <a:r>
+              <a:rPr lang="en-US" sz="1200" dirty="0">
+                <a:solidFill>
+                  <a:srgbClr val="233244"/>
+                </a:solidFill>
+                <a:latin typeface="Meiryo" pitchFamily="34" charset="0"/>
+                <a:ea typeface="Meiryo" pitchFamily="34" charset="-122"/>
+                <a:cs typeface="Meiryo" pitchFamily="34" charset="-120"/>
+              </a:rPr>
+              <a:t>・URL：サイトのトップ（/login など）</a:t>
+            </a:r>
+            <a:endParaRPr lang="en-US" sz="1200" dirty="0"/>
+          </a:p>
+        </p:txBody>
+      </p:sp>
+      <p:sp>
+        <p:nvSpPr>
+          <p:cNvPr id="12" name="Text 10"/>
+          <p:cNvSpPr/>
+          <p:nvPr/>
+        </p:nvSpPr>
+        <p:spPr>
+          <a:xfrm>
+            <a:off x="978408" y="3557016"/>
+            <a:ext cx="4626864" cy="365760"/>
+          </a:xfrm>
+          <a:prstGeom prst="rect">
+            <a:avLst/>
+          </a:prstGeom>
+          <a:noFill/>
+          <a:ln/>
+        </p:spPr>
+        <p:txBody>
+          <a:bodyPr wrap="square" lIns="0" tIns="0" rIns="0" bIns="0" rtlCol="0" anchor="ctr"/>
+          <a:lstStyle/>
+          <a:p>
+            <a:pPr indent="0" marL="0">
+              <a:buNone/>
+            </a:pPr>
+            <a:r>
+              <a:rPr lang="en-US" sz="1200" dirty="0">
+                <a:solidFill>
+                  <a:srgbClr val="233244"/>
+                </a:solidFill>
+                <a:latin typeface="Meiryo" pitchFamily="34" charset="0"/>
+                <a:ea typeface="Meiryo" pitchFamily="34" charset="-122"/>
+                <a:cs typeface="Meiryo" pitchFamily="34" charset="-120"/>
+              </a:rPr>
+              <a:t>・対象：つなぐ登録会社の皆さま</a:t>
+            </a:r>
+            <a:endParaRPr lang="en-US" sz="1200" dirty="0"/>
+          </a:p>
+        </p:txBody>
+      </p:sp>
+      <p:sp>
+        <p:nvSpPr>
+          <p:cNvPr id="13" name="Text 11"/>
+          <p:cNvSpPr/>
+          <p:nvPr/>
+        </p:nvSpPr>
+        <p:spPr>
+          <a:xfrm>
+            <a:off x="978408" y="3959352"/>
+            <a:ext cx="4626864" cy="365760"/>
+          </a:xfrm>
+          <a:prstGeom prst="rect">
+            <a:avLst/>
+          </a:prstGeom>
+          <a:noFill/>
+          <a:ln/>
+        </p:spPr>
+        <p:txBody>
+          <a:bodyPr wrap="square" lIns="0" tIns="0" rIns="0" bIns="0" rtlCol="0" anchor="ctr"/>
+          <a:lstStyle/>
+          <a:p>
+            <a:pPr indent="0" marL="0">
+              <a:buNone/>
+            </a:pPr>
+            <a:r>
+              <a:rPr lang="en-US" sz="1200" dirty="0">
+                <a:solidFill>
+                  <a:srgbClr val="233244"/>
+                </a:solidFill>
+                <a:latin typeface="Meiryo" pitchFamily="34" charset="0"/>
+                <a:ea typeface="Meiryo" pitchFamily="34" charset="-122"/>
+                <a:cs typeface="Meiryo" pitchFamily="34" charset="-120"/>
+              </a:rPr>
+              <a:t>・できること：依頼ページの閲覧・依頼</a:t>
+            </a:r>
+            <a:endParaRPr lang="en-US" sz="1200" dirty="0"/>
+          </a:p>
+        </p:txBody>
+      </p:sp>
+      <p:sp>
+        <p:nvSpPr>
+          <p:cNvPr id="14" name="Shape 12"/>
+          <p:cNvSpPr/>
+          <p:nvPr/>
+        </p:nvSpPr>
+        <p:spPr>
+          <a:xfrm>
+            <a:off x="6309360" y="1645920"/>
+            <a:ext cx="5212080" cy="3017520"/>
+          </a:xfrm>
+          <a:prstGeom prst="roundRect">
+            <a:avLst>
+              <a:gd name="adj" fmla="val 2424"/>
+            </a:avLst>
+          </a:prstGeom>
+          <a:solidFill>
             <a:srgbClr val="EAF3FF"/>
           </a:solidFill>
           <a:ln w="19050">
@@ -17553,14 +18100,14 @@
       </p:sp>
       <p:sp>
         <p:nvSpPr>
-          <p:cNvPr id="7" name="Shape 5"/>
-          <p:cNvSpPr/>
-          <p:nvPr/>
-        </p:nvSpPr>
-        <p:spPr>
-          <a:xfrm>
-            <a:off x="978408" y="1901952"/>
-            <a:ext cx="1554480" cy="329184"/>
+          <p:cNvPr id="15" name="Shape 13"/>
+          <p:cNvSpPr/>
+          <p:nvPr/>
+        </p:nvSpPr>
+        <p:spPr>
+          <a:xfrm>
+            <a:off x="6601968" y="1901952"/>
+            <a:ext cx="2148840" cy="329184"/>
           </a:xfrm>
           <a:prstGeom prst="roundRect">
             <a:avLst>
@@ -17575,14 +18122,14 @@
       </p:sp>
       <p:sp>
         <p:nvSpPr>
-          <p:cNvPr id="8" name="Text 6"/>
-          <p:cNvSpPr/>
-          <p:nvPr/>
-        </p:nvSpPr>
-        <p:spPr>
-          <a:xfrm>
-            <a:off x="978408" y="1901952"/>
-            <a:ext cx="1554480" cy="329184"/>
+          <p:cNvPr id="16" name="Text 14"/>
+          <p:cNvSpPr/>
+          <p:nvPr/>
+        </p:nvSpPr>
+        <p:spPr>
+          <a:xfrm>
+            <a:off x="6601968" y="1901952"/>
+            <a:ext cx="2148840" cy="329184"/>
           </a:xfrm>
           <a:prstGeom prst="rect">
             <a:avLst/>
@@ -17598,7 +18145,7 @@
               <a:buNone/>
             </a:pPr>
             <a:r>
-              <a:rPr lang="en-US" sz="1100" b="1" dirty="0">
+              <a:rPr lang="en-US" sz="1000" b="1" dirty="0">
                 <a:solidFill>
                   <a:srgbClr val="FFFFFF"/>
                 </a:solidFill>
@@ -17606,292 +18153,9 @@
                 <a:ea typeface="Meiryo" pitchFamily="34" charset="-122"/>
                 <a:cs typeface="Meiryo" pitchFamily="34" charset="-120"/>
               </a:rPr>
-              <a:t>会員の方</a:t>
-            </a:r>
-            <a:endParaRPr lang="en-US" sz="1100" dirty="0"/>
-          </a:p>
-        </p:txBody>
-      </p:sp>
-      <p:sp>
-        <p:nvSpPr>
-          <p:cNvPr id="9" name="Text 7"/>
-          <p:cNvSpPr/>
-          <p:nvPr/>
-        </p:nvSpPr>
-        <p:spPr>
-          <a:xfrm>
-            <a:off x="978408" y="2340864"/>
-            <a:ext cx="4626864" cy="402336"/>
-          </a:xfrm>
-          <a:prstGeom prst="rect">
-            <a:avLst/>
-          </a:prstGeom>
-          <a:noFill/>
-          <a:ln/>
-        </p:spPr>
-        <p:txBody>
-          <a:bodyPr wrap="square" lIns="0" tIns="0" rIns="0" bIns="0" rtlCol="0" anchor="ctr"/>
-          <a:lstStyle/>
-          <a:p>
-            <a:pPr indent="0" marL="0">
-              <a:buNone/>
-            </a:pPr>
-            <a:r>
-              <a:rPr lang="en-US" sz="2000" b="1" dirty="0">
-                <a:solidFill>
-                  <a:srgbClr val="11295A"/>
-                </a:solidFill>
-                <a:latin typeface="Meiryo" pitchFamily="34" charset="0"/>
-                <a:ea typeface="Meiryo" pitchFamily="34" charset="-122"/>
-                <a:cs typeface="Meiryo" pitchFamily="34" charset="-120"/>
-              </a:rPr>
-              <a:t>会員用ログイン</a:t>
-            </a:r>
-            <a:endParaRPr lang="en-US" sz="2000" dirty="0"/>
-          </a:p>
-        </p:txBody>
-      </p:sp>
-      <p:sp>
-        <p:nvSpPr>
-          <p:cNvPr id="10" name="Text 8"/>
-          <p:cNvSpPr/>
-          <p:nvPr/>
-        </p:nvSpPr>
-        <p:spPr>
-          <a:xfrm>
-            <a:off x="978408" y="2743200"/>
-            <a:ext cx="4626864" cy="292608"/>
-          </a:xfrm>
-          <a:prstGeom prst="rect">
-            <a:avLst/>
-          </a:prstGeom>
-          <a:noFill/>
-          <a:ln/>
-        </p:spPr>
-        <p:txBody>
-          <a:bodyPr wrap="square" lIns="0" tIns="0" rIns="0" bIns="0" rtlCol="0" anchor="ctr"/>
-          <a:lstStyle/>
-          <a:p>
-            <a:pPr indent="0" marL="0">
-              <a:buNone/>
-            </a:pPr>
-            <a:r>
-              <a:rPr lang="en-US" sz="1200" dirty="0">
-                <a:solidFill>
-                  <a:srgbClr val="5D6B7E"/>
-                </a:solidFill>
-                <a:latin typeface="Meiryo" pitchFamily="34" charset="0"/>
-                <a:ea typeface="Meiryo" pitchFamily="34" charset="-122"/>
-                <a:cs typeface="Meiryo" pitchFamily="34" charset="-120"/>
-              </a:rPr>
-              <a:t>サイトを閲覧するための入口</a:t>
-            </a:r>
-            <a:endParaRPr lang="en-US" sz="1200" dirty="0"/>
-          </a:p>
-        </p:txBody>
-      </p:sp>
-      <p:sp>
-        <p:nvSpPr>
-          <p:cNvPr id="11" name="Text 9"/>
-          <p:cNvSpPr/>
-          <p:nvPr/>
-        </p:nvSpPr>
-        <p:spPr>
-          <a:xfrm>
-            <a:off x="978408" y="3154680"/>
-            <a:ext cx="4626864" cy="365760"/>
-          </a:xfrm>
-          <a:prstGeom prst="rect">
-            <a:avLst/>
-          </a:prstGeom>
-          <a:noFill/>
-          <a:ln/>
-        </p:spPr>
-        <p:txBody>
-          <a:bodyPr wrap="square" lIns="0" tIns="0" rIns="0" bIns="0" rtlCol="0" anchor="ctr"/>
-          <a:lstStyle/>
-          <a:p>
-            <a:pPr indent="0" marL="0">
-              <a:buNone/>
-            </a:pPr>
-            <a:r>
-              <a:rPr lang="en-US" sz="1200" dirty="0">
-                <a:solidFill>
-                  <a:srgbClr val="233244"/>
-                </a:solidFill>
-                <a:latin typeface="Meiryo" pitchFamily="34" charset="0"/>
-                <a:ea typeface="Meiryo" pitchFamily="34" charset="-122"/>
-                <a:cs typeface="Meiryo" pitchFamily="34" charset="-120"/>
-              </a:rPr>
-              <a:t>・URL：サイトのトップ（/login など）</a:t>
-            </a:r>
-            <a:endParaRPr lang="en-US" sz="1200" dirty="0"/>
-          </a:p>
-        </p:txBody>
-      </p:sp>
-      <p:sp>
-        <p:nvSpPr>
-          <p:cNvPr id="12" name="Text 10"/>
-          <p:cNvSpPr/>
-          <p:nvPr/>
-        </p:nvSpPr>
-        <p:spPr>
-          <a:xfrm>
-            <a:off x="978408" y="3557016"/>
-            <a:ext cx="4626864" cy="365760"/>
-          </a:xfrm>
-          <a:prstGeom prst="rect">
-            <a:avLst/>
-          </a:prstGeom>
-          <a:noFill/>
-          <a:ln/>
-        </p:spPr>
-        <p:txBody>
-          <a:bodyPr wrap="square" lIns="0" tIns="0" rIns="0" bIns="0" rtlCol="0" anchor="ctr"/>
-          <a:lstStyle/>
-          <a:p>
-            <a:pPr indent="0" marL="0">
-              <a:buNone/>
-            </a:pPr>
-            <a:r>
-              <a:rPr lang="en-US" sz="1200" dirty="0">
-                <a:solidFill>
-                  <a:srgbClr val="233244"/>
-                </a:solidFill>
-                <a:latin typeface="Meiryo" pitchFamily="34" charset="0"/>
-                <a:ea typeface="Meiryo" pitchFamily="34" charset="-122"/>
-                <a:cs typeface="Meiryo" pitchFamily="34" charset="-120"/>
-              </a:rPr>
-              <a:t>・対象：つなぐ登録会社の皆さま</a:t>
-            </a:r>
-            <a:endParaRPr lang="en-US" sz="1200" dirty="0"/>
-          </a:p>
-        </p:txBody>
-      </p:sp>
-      <p:sp>
-        <p:nvSpPr>
-          <p:cNvPr id="13" name="Text 11"/>
-          <p:cNvSpPr/>
-          <p:nvPr/>
-        </p:nvSpPr>
-        <p:spPr>
-          <a:xfrm>
-            <a:off x="978408" y="3959352"/>
-            <a:ext cx="4626864" cy="365760"/>
-          </a:xfrm>
-          <a:prstGeom prst="rect">
-            <a:avLst/>
-          </a:prstGeom>
-          <a:noFill/>
-          <a:ln/>
-        </p:spPr>
-        <p:txBody>
-          <a:bodyPr wrap="square" lIns="0" tIns="0" rIns="0" bIns="0" rtlCol="0" anchor="ctr"/>
-          <a:lstStyle/>
-          <a:p>
-            <a:pPr indent="0" marL="0">
-              <a:buNone/>
-            </a:pPr>
-            <a:r>
-              <a:rPr lang="en-US" sz="1200" dirty="0">
-                <a:solidFill>
-                  <a:srgbClr val="233244"/>
-                </a:solidFill>
-                <a:latin typeface="Meiryo" pitchFamily="34" charset="0"/>
-                <a:ea typeface="Meiryo" pitchFamily="34" charset="-122"/>
-                <a:cs typeface="Meiryo" pitchFamily="34" charset="-120"/>
-              </a:rPr>
-              <a:t>・できること：依頼ページの閲覧・依頼</a:t>
-            </a:r>
-            <a:endParaRPr lang="en-US" sz="1200" dirty="0"/>
-          </a:p>
-        </p:txBody>
-      </p:sp>
-      <p:sp>
-        <p:nvSpPr>
-          <p:cNvPr id="14" name="Shape 12"/>
-          <p:cNvSpPr/>
-          <p:nvPr/>
-        </p:nvSpPr>
-        <p:spPr>
-          <a:xfrm>
-            <a:off x="6309360" y="1645920"/>
-            <a:ext cx="5212080" cy="3017520"/>
-          </a:xfrm>
-          <a:prstGeom prst="roundRect">
-            <a:avLst>
-              <a:gd name="adj" fmla="val 2424"/>
-            </a:avLst>
-          </a:prstGeom>
-          <a:solidFill>
-            <a:srgbClr val="F3F7FC"/>
-          </a:solidFill>
-          <a:ln w="19050">
-            <a:solidFill>
-              <a:srgbClr val="E4EAF2"/>
-            </a:solidFill>
-            <a:prstDash val="solid"/>
-          </a:ln>
-        </p:spPr>
-      </p:sp>
-      <p:sp>
-        <p:nvSpPr>
-          <p:cNvPr id="15" name="Shape 13"/>
-          <p:cNvSpPr/>
-          <p:nvPr/>
-        </p:nvSpPr>
-        <p:spPr>
-          <a:xfrm>
-            <a:off x="6601968" y="1901952"/>
-            <a:ext cx="1554480" cy="329184"/>
-          </a:xfrm>
-          <a:prstGeom prst="roundRect">
-            <a:avLst>
-              <a:gd name="adj" fmla="val 50000"/>
-            </a:avLst>
-          </a:prstGeom>
-          <a:solidFill>
-            <a:srgbClr val="11295A"/>
-          </a:solidFill>
-          <a:ln/>
-        </p:spPr>
-      </p:sp>
-      <p:sp>
-        <p:nvSpPr>
-          <p:cNvPr id="16" name="Text 14"/>
-          <p:cNvSpPr/>
-          <p:nvPr/>
-        </p:nvSpPr>
-        <p:spPr>
-          <a:xfrm>
-            <a:off x="6601968" y="1901952"/>
-            <a:ext cx="1554480" cy="329184"/>
-          </a:xfrm>
-          <a:prstGeom prst="rect">
-            <a:avLst/>
-          </a:prstGeom>
-          <a:noFill/>
-          <a:ln/>
-        </p:spPr>
-        <p:txBody>
-          <a:bodyPr wrap="square" lIns="0" tIns="0" rIns="0" bIns="0" rtlCol="0" anchor="ctr"/>
-          <a:lstStyle/>
-          <a:p>
-            <a:pPr algn="ctr" indent="0" marL="0">
-              <a:buNone/>
-            </a:pPr>
-            <a:r>
-              <a:rPr lang="en-US" sz="1100" b="1" dirty="0">
-                <a:solidFill>
-                  <a:srgbClr val="FFFFFF"/>
-                </a:solidFill>
-                <a:latin typeface="Meiryo" pitchFamily="34" charset="0"/>
-                <a:ea typeface="Meiryo" pitchFamily="34" charset="-122"/>
-                <a:cs typeface="Meiryo" pitchFamily="34" charset="-120"/>
-              </a:rPr>
-              <a:t>管理者の方</a:t>
-            </a:r>
-            <a:endParaRPr lang="en-US" sz="1100" dirty="0"/>
+              <a:t>管理者の方（本書の対象）</a:t>
+            </a:r>
+            <a:endParaRPr lang="en-US" sz="1000" dirty="0"/>
           </a:p>
         </p:txBody>
       </p:sp>
@@ -19345,27 +19609,7 @@
                 <a:ea typeface="Meiryo" pitchFamily="34" charset="-122"/>
                 <a:cs typeface="Meiryo" pitchFamily="34" charset="-120"/>
               </a:rPr>
-              <a:t>カスタムフィールド</a:t>
-            </a:r>
-            <a:endParaRPr lang="en-US" sz="1400" dirty="0"/>
-          </a:p>
-          <a:p>
-            <a:pPr indent="0" marL="0">
-              <a:lnSpc>
-                <a:spcPct val="110000"/>
-              </a:lnSpc>
-              <a:buNone/>
-            </a:pPr>
-            <a:r>
-              <a:rPr lang="en-US" sz="1400" b="1" dirty="0">
-                <a:solidFill>
-                  <a:srgbClr val="11295A"/>
-                </a:solidFill>
-                <a:latin typeface="Meiryo" pitchFamily="34" charset="0"/>
-                <a:ea typeface="Meiryo" pitchFamily="34" charset="-122"/>
-                <a:cs typeface="Meiryo" pitchFamily="34" charset="-120"/>
-              </a:rPr>
-              <a:t>を修正</a:t>
+              <a:t>入力欄を修正</a:t>
             </a:r>
             <a:endParaRPr lang="en-US" sz="1400" dirty="0"/>
           </a:p>
@@ -19407,7 +19651,7 @@
                 <a:ea typeface="Meiryo" pitchFamily="34" charset="-122"/>
                 <a:cs typeface="Meiryo" pitchFamily="34" charset="-120"/>
               </a:rPr>
-              <a:t>本文の下にある</a:t>
+              <a:t>カスタムフィールドを</a:t>
             </a:r>
             <a:endParaRPr lang="en-US" sz="1100" dirty="0"/>
           </a:p>
@@ -19427,7 +19671,7 @@
                 <a:ea typeface="Meiryo" pitchFamily="34" charset="-122"/>
                 <a:cs typeface="Meiryo" pitchFamily="34" charset="-120"/>
               </a:rPr>
-              <a:t>入力欄を編集</a:t>
+              <a:t>編集します</a:t>
             </a:r>
             <a:endParaRPr lang="en-US" sz="1100" dirty="0"/>
           </a:p>
